--- a/docs/Research_Canvas.pptx
+++ b/docs/Research_Canvas.pptx
@@ -4773,7 +4773,7 @@
                           <a:ea typeface="Calibri"/>
                           <a:cs typeface="Calibri"/>
                         </a:rPr>
-                        <a:t>Stage 1 is complete in one notebook: probes, geometry, a composition control, attention nulls and published-split comparisons for twelve encoders on two datasets.</a:t>
+                        <a:t>Stage 1 is complete across two notebooks: probes, geometry, a composition control, attention nulls and published-split comparisons for twelve encoders on two datasets.</a:t>
                       </a:r>
                     </a:p>
                     <a:p>
